--- a/assets/template_utp_alumnos.pptx
+++ b/assets/template_utp_alumnos.pptx
@@ -283,6 +283,131 @@
     </p:ext>
   </p:extLst>
 </p:presentation>
+</file>
+
+<file path=ppt/revisionInfo.xml><?xml version="1.0" encoding="utf-8"?>
+<p1510:revInfo xmlns:a="http://schemas.openxmlformats.org/drawingml/2006/main" xmlns:r="http://schemas.openxmlformats.org/officeDocument/2006/relationships" xmlns:p1510="http://schemas.microsoft.com/office/powerpoint/2015/10/main">
+  <p1510:revLst>
+    <p1510:client id="{B88747C2-82D1-4EF1-B2BE-7360204C626C}" v="1" dt="2026-04-29T19:05:27.229"/>
+  </p1510:revLst>
+</p1510:revInfo>
+</file>
+
+<file path=ppt/changesInfos/changesInfo1.xml><?xml version="1.0" encoding="utf-8"?>
+<pc:chgInfo xmlns:a="http://schemas.openxmlformats.org/drawingml/2006/main" xmlns:r="http://schemas.openxmlformats.org/officeDocument/2006/relationships" xmlns:ac="http://schemas.microsoft.com/office/drawing/2013/main/command" xmlns:pc="http://schemas.microsoft.com/office/powerpoint/2013/main/command">
+  <pc:docChgLst>
+    <pc:chgData name="juani vila bach" userId="140d79d91c36b714" providerId="LiveId" clId="{681BBBA0-CB6B-4408-8383-25A2ECA50787}"/>
+    <pc:docChg chg="custSel modSld">
+      <pc:chgData name="juani vila bach" userId="140d79d91c36b714" providerId="LiveId" clId="{681BBBA0-CB6B-4408-8383-25A2ECA50787}" dt="2026-04-29T19:05:38.398" v="22" actId="20577"/>
+      <pc:docMkLst>
+        <pc:docMk/>
+      </pc:docMkLst>
+      <pc:sldChg chg="addSp delSp modSp mod">
+        <pc:chgData name="juani vila bach" userId="140d79d91c36b714" providerId="LiveId" clId="{681BBBA0-CB6B-4408-8383-25A2ECA50787}" dt="2026-04-29T19:05:38.398" v="22" actId="20577"/>
+        <pc:sldMkLst>
+          <pc:docMk/>
+          <pc:sldMk cId="0" sldId="259"/>
+        </pc:sldMkLst>
+        <pc:spChg chg="add mod">
+          <ac:chgData name="juani vila bach" userId="140d79d91c36b714" providerId="LiveId" clId="{681BBBA0-CB6B-4408-8383-25A2ECA50787}" dt="2026-04-29T19:05:31.540" v="8" actId="20577"/>
+          <ac:spMkLst>
+            <pc:docMk/>
+            <pc:sldMk cId="0" sldId="259"/>
+            <ac:spMk id="2" creationId="{35FE0090-AC39-1702-7481-D60E0E0731F5}"/>
+          </ac:spMkLst>
+        </pc:spChg>
+        <pc:spChg chg="add mod">
+          <ac:chgData name="juani vila bach" userId="140d79d91c36b714" providerId="LiveId" clId="{681BBBA0-CB6B-4408-8383-25A2ECA50787}" dt="2026-04-29T19:05:27.229" v="1"/>
+          <ac:spMkLst>
+            <pc:docMk/>
+            <pc:sldMk cId="0" sldId="259"/>
+            <ac:spMk id="3" creationId="{A28FE153-0F8C-3F07-4710-1A0D561F20BF}"/>
+          </ac:spMkLst>
+        </pc:spChg>
+        <pc:spChg chg="add mod">
+          <ac:chgData name="juani vila bach" userId="140d79d91c36b714" providerId="LiveId" clId="{681BBBA0-CB6B-4408-8383-25A2ECA50787}" dt="2026-04-29T19:05:35.478" v="15" actId="20577"/>
+          <ac:spMkLst>
+            <pc:docMk/>
+            <pc:sldMk cId="0" sldId="259"/>
+            <ac:spMk id="4" creationId="{01EB8F01-133B-0FB6-394D-CF56B5149DAC}"/>
+          </ac:spMkLst>
+        </pc:spChg>
+        <pc:spChg chg="add mod">
+          <ac:chgData name="juani vila bach" userId="140d79d91c36b714" providerId="LiveId" clId="{681BBBA0-CB6B-4408-8383-25A2ECA50787}" dt="2026-04-29T19:05:27.229" v="1"/>
+          <ac:spMkLst>
+            <pc:docMk/>
+            <pc:sldMk cId="0" sldId="259"/>
+            <ac:spMk id="5" creationId="{EF1D2151-F37A-294E-C98C-F2DF43AB05D8}"/>
+          </ac:spMkLst>
+        </pc:spChg>
+        <pc:spChg chg="add mod">
+          <ac:chgData name="juani vila bach" userId="140d79d91c36b714" providerId="LiveId" clId="{681BBBA0-CB6B-4408-8383-25A2ECA50787}" dt="2026-04-29T19:05:38.398" v="22" actId="20577"/>
+          <ac:spMkLst>
+            <pc:docMk/>
+            <pc:sldMk cId="0" sldId="259"/>
+            <ac:spMk id="6" creationId="{5E8290D7-C3EB-1743-D72C-F0A6655D7FCF}"/>
+          </ac:spMkLst>
+        </pc:spChg>
+        <pc:spChg chg="add mod">
+          <ac:chgData name="juani vila bach" userId="140d79d91c36b714" providerId="LiveId" clId="{681BBBA0-CB6B-4408-8383-25A2ECA50787}" dt="2026-04-29T19:05:27.229" v="1"/>
+          <ac:spMkLst>
+            <pc:docMk/>
+            <pc:sldMk cId="0" sldId="259"/>
+            <ac:spMk id="7" creationId="{B8352233-FDDC-F12C-14EE-F1E2A8D65D59}"/>
+          </ac:spMkLst>
+        </pc:spChg>
+        <pc:spChg chg="del">
+          <ac:chgData name="juani vila bach" userId="140d79d91c36b714" providerId="LiveId" clId="{681BBBA0-CB6B-4408-8383-25A2ECA50787}" dt="2026-04-29T19:05:26.526" v="0" actId="478"/>
+          <ac:spMkLst>
+            <pc:docMk/>
+            <pc:sldMk cId="0" sldId="259"/>
+            <ac:spMk id="71" creationId="{00000000-0000-0000-0000-000000000000}"/>
+          </ac:spMkLst>
+        </pc:spChg>
+        <pc:spChg chg="del">
+          <ac:chgData name="juani vila bach" userId="140d79d91c36b714" providerId="LiveId" clId="{681BBBA0-CB6B-4408-8383-25A2ECA50787}" dt="2026-04-29T19:05:26.526" v="0" actId="478"/>
+          <ac:spMkLst>
+            <pc:docMk/>
+            <pc:sldMk cId="0" sldId="259"/>
+            <ac:spMk id="72" creationId="{00000000-0000-0000-0000-000000000000}"/>
+          </ac:spMkLst>
+        </pc:spChg>
+        <pc:spChg chg="del">
+          <ac:chgData name="juani vila bach" userId="140d79d91c36b714" providerId="LiveId" clId="{681BBBA0-CB6B-4408-8383-25A2ECA50787}" dt="2026-04-29T19:05:26.526" v="0" actId="478"/>
+          <ac:spMkLst>
+            <pc:docMk/>
+            <pc:sldMk cId="0" sldId="259"/>
+            <ac:spMk id="73" creationId="{00000000-0000-0000-0000-000000000000}"/>
+          </ac:spMkLst>
+        </pc:spChg>
+        <pc:spChg chg="del">
+          <ac:chgData name="juani vila bach" userId="140d79d91c36b714" providerId="LiveId" clId="{681BBBA0-CB6B-4408-8383-25A2ECA50787}" dt="2026-04-29T19:05:26.526" v="0" actId="478"/>
+          <ac:spMkLst>
+            <pc:docMk/>
+            <pc:sldMk cId="0" sldId="259"/>
+            <ac:spMk id="74" creationId="{00000000-0000-0000-0000-000000000000}"/>
+          </ac:spMkLst>
+        </pc:spChg>
+        <pc:spChg chg="del">
+          <ac:chgData name="juani vila bach" userId="140d79d91c36b714" providerId="LiveId" clId="{681BBBA0-CB6B-4408-8383-25A2ECA50787}" dt="2026-04-29T19:05:26.526" v="0" actId="478"/>
+          <ac:spMkLst>
+            <pc:docMk/>
+            <pc:sldMk cId="0" sldId="259"/>
+            <ac:spMk id="75" creationId="{00000000-0000-0000-0000-000000000000}"/>
+          </ac:spMkLst>
+        </pc:spChg>
+        <pc:spChg chg="del">
+          <ac:chgData name="juani vila bach" userId="140d79d91c36b714" providerId="LiveId" clId="{681BBBA0-CB6B-4408-8383-25A2ECA50787}" dt="2026-04-29T19:05:26.526" v="0" actId="478"/>
+          <ac:spMkLst>
+            <pc:docMk/>
+            <pc:sldMk cId="0" sldId="259"/>
+            <ac:spMk id="76" creationId="{00000000-0000-0000-0000-000000000000}"/>
+          </ac:spMkLst>
+        </pc:spChg>
+      </pc:sldChg>
+    </pc:docChg>
+  </pc:docChgLst>
+</pc:chgInfo>
 </file>
 
 <file path=ppt/notesMasters/notesMaster1.xml><?xml version="1.0" encoding="utf-8"?>
@@ -6811,13 +6936,19 @@
       </p:grpSpPr>
       <p:sp>
         <p:nvSpPr>
-          <p:cNvPr id="71" name="Google Shape;71;p16"/>
+          <p:cNvPr id="2" name="Google Shape;71;p16">
+            <a:extLst>
+              <a:ext uri="{FF2B5EF4-FFF2-40B4-BE49-F238E27FC236}">
+                <a16:creationId xmlns:a16="http://schemas.microsoft.com/office/drawing/2014/main" id="{35FE0090-AC39-1702-7481-D60E0E0731F5}"/>
+              </a:ext>
+            </a:extLst>
+          </p:cNvPr>
           <p:cNvSpPr txBox="1"/>
           <p:nvPr/>
         </p:nvSpPr>
         <p:spPr>
           <a:xfrm>
-            <a:off x="1450475" y="9423975"/>
+            <a:off x="1450475" y="9505349"/>
             <a:ext cx="7357200" cy="1597200"/>
           </a:xfrm>
           <a:prstGeom prst="rect">
@@ -6918,7 +7049,13 @@
       </p:sp>
       <p:sp>
         <p:nvSpPr>
-          <p:cNvPr id="72" name="Google Shape;72;p16"/>
+          <p:cNvPr id="3" name="Google Shape;72;p16">
+            <a:extLst>
+              <a:ext uri="{FF2B5EF4-FFF2-40B4-BE49-F238E27FC236}">
+                <a16:creationId xmlns:a16="http://schemas.microsoft.com/office/drawing/2014/main" id="{A28FE153-0F8C-3F07-4710-1A0D561F20BF}"/>
+              </a:ext>
+            </a:extLst>
+          </p:cNvPr>
           <p:cNvSpPr txBox="1"/>
           <p:nvPr/>
         </p:nvSpPr>
@@ -6964,7 +7101,7 @@
                 <a:cs typeface="Public Sans"/>
                 <a:sym typeface="Public Sans"/>
               </a:rPr>
-              <a:t>&lt;&lt;GARDNER_01&gt;&gt;</a:t>
+              <a:t>&lt;&lt;gardner_01&gt;&gt;</a:t>
             </a:r>
             <a:endParaRPr sz="2150" b="1" dirty="0">
               <a:solidFill>
@@ -7004,13 +7141,19 @@
       </p:sp>
       <p:sp>
         <p:nvSpPr>
-          <p:cNvPr id="73" name="Google Shape;73;p16"/>
+          <p:cNvPr id="4" name="Google Shape;73;p16">
+            <a:extLst>
+              <a:ext uri="{FF2B5EF4-FFF2-40B4-BE49-F238E27FC236}">
+                <a16:creationId xmlns:a16="http://schemas.microsoft.com/office/drawing/2014/main" id="{01EB8F01-133B-0FB6-394D-CF56B5149DAC}"/>
+              </a:ext>
+            </a:extLst>
+          </p:cNvPr>
           <p:cNvSpPr txBox="1"/>
           <p:nvPr/>
         </p:nvSpPr>
         <p:spPr>
           <a:xfrm>
-            <a:off x="1464900" y="11819650"/>
+            <a:off x="1450475" y="12245287"/>
             <a:ext cx="7357200" cy="1597200"/>
           </a:xfrm>
           <a:prstGeom prst="rect">
@@ -7027,11 +7170,18 @@
           </a:bodyPr>
           <a:lstStyle/>
           <a:p>
-            <a:pPr lvl="0">
+            <a:pPr marL="0" lvl="0" indent="0" algn="l" rtl="0">
               <a:lnSpc>
                 <a:spcPct val="150000"/>
               </a:lnSpc>
+              <a:spcBef>
+                <a:spcPts val="0"/>
+              </a:spcBef>
+              <a:spcAft>
+                <a:spcPts val="0"/>
+              </a:spcAft>
               <a:buSzPts val="853"/>
+              <a:buNone/>
             </a:pPr>
             <a:r>
               <a:rPr lang="es-419" sz="2000" dirty="0">
@@ -7045,6 +7195,15 @@
               </a:rPr>
               <a:t>&lt;&lt;gardner_02_desc&gt;&gt;</a:t>
             </a:r>
+            <a:endParaRPr sz="2000" dirty="0">
+              <a:solidFill>
+                <a:schemeClr val="dk1"/>
+              </a:solidFill>
+              <a:latin typeface="Formular" panose="02000000000000000000" pitchFamily="2" charset="0"/>
+              <a:ea typeface="Public Sans Light"/>
+              <a:cs typeface="Public Sans Light"/>
+              <a:sym typeface="Public Sans Light"/>
+            </a:endParaRPr>
           </a:p>
           <a:p>
             <a:pPr marL="0" lvl="0" indent="0" algn="l" rtl="0">
@@ -7095,13 +7254,19 @@
       </p:sp>
       <p:sp>
         <p:nvSpPr>
-          <p:cNvPr id="74" name="Google Shape;74;p16"/>
+          <p:cNvPr id="5" name="Google Shape;74;p16">
+            <a:extLst>
+              <a:ext uri="{FF2B5EF4-FFF2-40B4-BE49-F238E27FC236}">
+                <a16:creationId xmlns:a16="http://schemas.microsoft.com/office/drawing/2014/main" id="{EF1D2151-F37A-294E-C98C-F2DF43AB05D8}"/>
+              </a:ext>
+            </a:extLst>
+          </p:cNvPr>
           <p:cNvSpPr txBox="1"/>
           <p:nvPr/>
         </p:nvSpPr>
         <p:spPr>
           <a:xfrm>
-            <a:off x="1464900" y="11242399"/>
+            <a:off x="1464900" y="11586662"/>
             <a:ext cx="7357200" cy="485700"/>
           </a:xfrm>
           <a:prstGeom prst="rect">
@@ -7141,7 +7306,7 @@
                 <a:cs typeface="Public Sans"/>
                 <a:sym typeface="Public Sans"/>
               </a:rPr>
-              <a:t>&lt;&lt;GARDNER_02&gt;&gt;</a:t>
+              <a:t>&lt;&lt;gardner_02&gt;&gt;</a:t>
             </a:r>
             <a:endParaRPr sz="2150" b="1" dirty="0">
               <a:solidFill>
@@ -7181,13 +7346,19 @@
       </p:sp>
       <p:sp>
         <p:nvSpPr>
-          <p:cNvPr id="75" name="Google Shape;75;p16"/>
+          <p:cNvPr id="6" name="Google Shape;75;p16">
+            <a:extLst>
+              <a:ext uri="{FF2B5EF4-FFF2-40B4-BE49-F238E27FC236}">
+                <a16:creationId xmlns:a16="http://schemas.microsoft.com/office/drawing/2014/main" id="{5E8290D7-C3EB-1743-D72C-F0A6655D7FCF}"/>
+              </a:ext>
+            </a:extLst>
+          </p:cNvPr>
           <p:cNvSpPr txBox="1"/>
           <p:nvPr/>
         </p:nvSpPr>
         <p:spPr>
           <a:xfrm>
-            <a:off x="1450475" y="14287500"/>
+            <a:off x="1450475" y="15287823"/>
             <a:ext cx="7357200" cy="1597200"/>
           </a:xfrm>
           <a:prstGeom prst="rect">
@@ -7204,11 +7375,18 @@
           </a:bodyPr>
           <a:lstStyle/>
           <a:p>
-            <a:pPr lvl="0">
+            <a:pPr marL="0" lvl="0" indent="0" algn="l" rtl="0">
               <a:lnSpc>
                 <a:spcPct val="150000"/>
               </a:lnSpc>
+              <a:spcBef>
+                <a:spcPts val="0"/>
+              </a:spcBef>
+              <a:spcAft>
+                <a:spcPts val="0"/>
+              </a:spcAft>
               <a:buSzPts val="853"/>
+              <a:buNone/>
             </a:pPr>
             <a:r>
               <a:rPr lang="es-419" sz="2000" dirty="0">
@@ -7222,6 +7400,15 @@
               </a:rPr>
               <a:t>&lt;&lt;gardner_03_desc&gt;&gt;</a:t>
             </a:r>
+            <a:endParaRPr sz="2000" dirty="0">
+              <a:solidFill>
+                <a:schemeClr val="dk1"/>
+              </a:solidFill>
+              <a:latin typeface="Formular" panose="02000000000000000000" pitchFamily="2" charset="0"/>
+              <a:ea typeface="Public Sans Light"/>
+              <a:cs typeface="Public Sans Light"/>
+              <a:sym typeface="Public Sans Light"/>
+            </a:endParaRPr>
           </a:p>
           <a:p>
             <a:pPr marL="0" lvl="0" indent="0" algn="l" rtl="0">
@@ -7272,13 +7459,19 @@
       </p:sp>
       <p:sp>
         <p:nvSpPr>
-          <p:cNvPr id="76" name="Google Shape;76;p16"/>
+          <p:cNvPr id="7" name="Google Shape;76;p16">
+            <a:extLst>
+              <a:ext uri="{FF2B5EF4-FFF2-40B4-BE49-F238E27FC236}">
+                <a16:creationId xmlns:a16="http://schemas.microsoft.com/office/drawing/2014/main" id="{B8352233-FDDC-F12C-14EE-F1E2A8D65D59}"/>
+              </a:ext>
+            </a:extLst>
+          </p:cNvPr>
           <p:cNvSpPr txBox="1"/>
           <p:nvPr/>
         </p:nvSpPr>
         <p:spPr>
           <a:xfrm>
-            <a:off x="1450475" y="13710249"/>
+            <a:off x="1450475" y="14629198"/>
             <a:ext cx="7357200" cy="485700"/>
           </a:xfrm>
           <a:prstGeom prst="rect">
@@ -7318,7 +7511,7 @@
                 <a:cs typeface="Public Sans"/>
                 <a:sym typeface="Public Sans"/>
               </a:rPr>
-              <a:t>&lt;&lt;GARDNER_03&gt;&gt;</a:t>
+              <a:t>&lt;&lt;gardner_03&gt;&gt;</a:t>
             </a:r>
             <a:endParaRPr sz="2150" b="1" dirty="0">
               <a:solidFill>

--- a/assets/template_utp_alumnos.pptx
+++ b/assets/template_utp_alumnos.pptx
@@ -288,7 +288,7 @@
 <file path=ppt/revisionInfo.xml><?xml version="1.0" encoding="utf-8"?>
 <p1510:revInfo xmlns:a="http://schemas.openxmlformats.org/drawingml/2006/main" xmlns:r="http://schemas.openxmlformats.org/officeDocument/2006/relationships" xmlns:p1510="http://schemas.microsoft.com/office/powerpoint/2015/10/main">
   <p1510:revLst>
-    <p1510:client id="{B88747C2-82D1-4EF1-B2BE-7360204C626C}" v="1" dt="2026-04-29T19:05:27.229"/>
+    <p1510:client id="{B88747C2-82D1-4EF1-B2BE-7360204C626C}" v="6" dt="2026-04-29T20:44:33.041"/>
   </p1510:revLst>
 </p1510:revInfo>
 </file>
@@ -297,19 +297,42 @@
 <pc:chgInfo xmlns:a="http://schemas.openxmlformats.org/drawingml/2006/main" xmlns:r="http://schemas.openxmlformats.org/officeDocument/2006/relationships" xmlns:ac="http://schemas.microsoft.com/office/drawing/2013/main/command" xmlns:pc="http://schemas.microsoft.com/office/powerpoint/2013/main/command">
   <pc:docChgLst>
     <pc:chgData name="juani vila bach" userId="140d79d91c36b714" providerId="LiveId" clId="{681BBBA0-CB6B-4408-8383-25A2ECA50787}"/>
-    <pc:docChg chg="custSel modSld">
-      <pc:chgData name="juani vila bach" userId="140d79d91c36b714" providerId="LiveId" clId="{681BBBA0-CB6B-4408-8383-25A2ECA50787}" dt="2026-04-29T19:05:38.398" v="22" actId="20577"/>
+    <pc:docChg chg="undo custSel modSld">
+      <pc:chgData name="juani vila bach" userId="140d79d91c36b714" providerId="LiveId" clId="{681BBBA0-CB6B-4408-8383-25A2ECA50787}" dt="2026-04-29T20:45:29.205" v="60" actId="120"/>
       <pc:docMkLst>
         <pc:docMk/>
       </pc:docMkLst>
+      <pc:sldChg chg="modSp mod">
+        <pc:chgData name="juani vila bach" userId="140d79d91c36b714" providerId="LiveId" clId="{681BBBA0-CB6B-4408-8383-25A2ECA50787}" dt="2026-04-29T20:41:50.291" v="23" actId="2711"/>
+        <pc:sldMkLst>
+          <pc:docMk/>
+          <pc:sldMk cId="0" sldId="258"/>
+        </pc:sldMkLst>
+        <pc:spChg chg="mod">
+          <ac:chgData name="juani vila bach" userId="140d79d91c36b714" providerId="LiveId" clId="{681BBBA0-CB6B-4408-8383-25A2ECA50787}" dt="2026-04-29T20:41:50.291" v="23" actId="2711"/>
+          <ac:spMkLst>
+            <pc:docMk/>
+            <pc:sldMk cId="0" sldId="258"/>
+            <ac:spMk id="64" creationId="{00000000-0000-0000-0000-000000000000}"/>
+          </ac:spMkLst>
+        </pc:spChg>
+        <pc:spChg chg="mod">
+          <ac:chgData name="juani vila bach" userId="140d79d91c36b714" providerId="LiveId" clId="{681BBBA0-CB6B-4408-8383-25A2ECA50787}" dt="2026-04-29T20:41:50.291" v="23" actId="2711"/>
+          <ac:spMkLst>
+            <pc:docMk/>
+            <pc:sldMk cId="0" sldId="258"/>
+            <ac:spMk id="65" creationId="{00000000-0000-0000-0000-000000000000}"/>
+          </ac:spMkLst>
+        </pc:spChg>
+      </pc:sldChg>
       <pc:sldChg chg="addSp delSp modSp mod">
-        <pc:chgData name="juani vila bach" userId="140d79d91c36b714" providerId="LiveId" clId="{681BBBA0-CB6B-4408-8383-25A2ECA50787}" dt="2026-04-29T19:05:38.398" v="22" actId="20577"/>
+        <pc:chgData name="juani vila bach" userId="140d79d91c36b714" providerId="LiveId" clId="{681BBBA0-CB6B-4408-8383-25A2ECA50787}" dt="2026-04-29T20:42:08.448" v="28" actId="1036"/>
         <pc:sldMkLst>
           <pc:docMk/>
           <pc:sldMk cId="0" sldId="259"/>
         </pc:sldMkLst>
         <pc:spChg chg="add mod">
-          <ac:chgData name="juani vila bach" userId="140d79d91c36b714" providerId="LiveId" clId="{681BBBA0-CB6B-4408-8383-25A2ECA50787}" dt="2026-04-29T19:05:31.540" v="8" actId="20577"/>
+          <ac:chgData name="juani vila bach" userId="140d79d91c36b714" providerId="LiveId" clId="{681BBBA0-CB6B-4408-8383-25A2ECA50787}" dt="2026-04-29T20:42:08.448" v="28" actId="1036"/>
           <ac:spMkLst>
             <pc:docMk/>
             <pc:sldMk cId="0" sldId="259"/>
@@ -325,7 +348,7 @@
           </ac:spMkLst>
         </pc:spChg>
         <pc:spChg chg="add mod">
-          <ac:chgData name="juani vila bach" userId="140d79d91c36b714" providerId="LiveId" clId="{681BBBA0-CB6B-4408-8383-25A2ECA50787}" dt="2026-04-29T19:05:35.478" v="15" actId="20577"/>
+          <ac:chgData name="juani vila bach" userId="140d79d91c36b714" providerId="LiveId" clId="{681BBBA0-CB6B-4408-8383-25A2ECA50787}" dt="2026-04-29T20:42:08.448" v="28" actId="1036"/>
           <ac:spMkLst>
             <pc:docMk/>
             <pc:sldMk cId="0" sldId="259"/>
@@ -341,7 +364,7 @@
           </ac:spMkLst>
         </pc:spChg>
         <pc:spChg chg="add mod">
-          <ac:chgData name="juani vila bach" userId="140d79d91c36b714" providerId="LiveId" clId="{681BBBA0-CB6B-4408-8383-25A2ECA50787}" dt="2026-04-29T19:05:38.398" v="22" actId="20577"/>
+          <ac:chgData name="juani vila bach" userId="140d79d91c36b714" providerId="LiveId" clId="{681BBBA0-CB6B-4408-8383-25A2ECA50787}" dt="2026-04-29T20:42:08.448" v="28" actId="1036"/>
           <ac:spMkLst>
             <pc:docMk/>
             <pc:sldMk cId="0" sldId="259"/>
@@ -402,6 +425,29 @@
             <pc:docMk/>
             <pc:sldMk cId="0" sldId="259"/>
             <ac:spMk id="76" creationId="{00000000-0000-0000-0000-000000000000}"/>
+          </ac:spMkLst>
+        </pc:spChg>
+      </pc:sldChg>
+      <pc:sldChg chg="addSp delSp modSp mod">
+        <pc:chgData name="juani vila bach" userId="140d79d91c36b714" providerId="LiveId" clId="{681BBBA0-CB6B-4408-8383-25A2ECA50787}" dt="2026-04-29T20:45:29.205" v="60" actId="120"/>
+        <pc:sldMkLst>
+          <pc:docMk/>
+          <pc:sldMk cId="0" sldId="260"/>
+        </pc:sldMkLst>
+        <pc:spChg chg="add del mod">
+          <ac:chgData name="juani vila bach" userId="140d79d91c36b714" providerId="LiveId" clId="{681BBBA0-CB6B-4408-8383-25A2ECA50787}" dt="2026-04-29T20:43:09.289" v="39" actId="478"/>
+          <ac:spMkLst>
+            <pc:docMk/>
+            <pc:sldMk cId="0" sldId="260"/>
+            <ac:spMk id="2" creationId="{BD6AED9D-657A-0B87-F240-6ACC1E86BFB6}"/>
+          </ac:spMkLst>
+        </pc:spChg>
+        <pc:spChg chg="mod">
+          <ac:chgData name="juani vila bach" userId="140d79d91c36b714" providerId="LiveId" clId="{681BBBA0-CB6B-4408-8383-25A2ECA50787}" dt="2026-04-29T20:45:29.205" v="60" actId="120"/>
+          <ac:spMkLst>
+            <pc:docMk/>
+            <pc:sldMk cId="0" sldId="260"/>
+            <ac:spMk id="81" creationId="{00000000-0000-0000-0000-000000000000}"/>
           </ac:spMkLst>
         </pc:spChg>
       </pc:sldChg>
@@ -6745,7 +6791,7 @@
                 <a:solidFill>
                   <a:schemeClr val="lt1"/>
                 </a:solidFill>
-                <a:latin typeface="TT Squares Black" panose="02000505040000020003" pitchFamily="50" charset="0"/>
+                <a:latin typeface="Formular" panose="02000000000000000000" pitchFamily="2" charset="0"/>
                 <a:ea typeface="Public Sans"/>
                 <a:cs typeface="Public Sans"/>
                 <a:sym typeface="Public Sans"/>
@@ -6756,7 +6802,7 @@
               <a:solidFill>
                 <a:schemeClr val="lt1"/>
               </a:solidFill>
-              <a:latin typeface="TT Squares Black" panose="02000505040000020003" pitchFamily="50" charset="0"/>
+              <a:latin typeface="Formular" panose="02000000000000000000" pitchFamily="2" charset="0"/>
               <a:ea typeface="Public Sans"/>
               <a:cs typeface="Public Sans"/>
               <a:sym typeface="Public Sans"/>
@@ -6808,7 +6854,7 @@
                 <a:solidFill>
                   <a:schemeClr val="lt1"/>
                 </a:solidFill>
-                <a:latin typeface="TT Squares Black" panose="02000505040000020003" pitchFamily="50" charset="0"/>
+                <a:latin typeface="Formular" panose="02000000000000000000" pitchFamily="2" charset="0"/>
                 <a:ea typeface="Public Sans"/>
                 <a:cs typeface="Public Sans"/>
                 <a:sym typeface="Public Sans"/>
@@ -6819,7 +6865,7 @@
               <a:solidFill>
                 <a:schemeClr val="lt1"/>
               </a:solidFill>
-              <a:latin typeface="TT Squares Black" panose="02000505040000020003" pitchFamily="50" charset="0"/>
+              <a:latin typeface="Formular" panose="02000000000000000000" pitchFamily="2" charset="0"/>
               <a:ea typeface="Public Sans"/>
               <a:cs typeface="Public Sans"/>
               <a:sym typeface="Public Sans"/>
@@ -6839,7 +6885,7 @@
               <a:solidFill>
                 <a:schemeClr val="lt1"/>
               </a:solidFill>
-              <a:latin typeface="TT Squares Black" panose="02000505040000020003" pitchFamily="50" charset="0"/>
+              <a:latin typeface="Formular" panose="02000000000000000000" pitchFamily="2" charset="0"/>
               <a:ea typeface="Public Sans"/>
               <a:cs typeface="Public Sans"/>
               <a:sym typeface="Public Sans"/>
@@ -6948,7 +6994,7 @@
         </p:nvSpPr>
         <p:spPr>
           <a:xfrm>
-            <a:off x="1450475" y="9505349"/>
+            <a:off x="1450475" y="9424667"/>
             <a:ext cx="7357200" cy="1597200"/>
           </a:xfrm>
           <a:prstGeom prst="rect">
@@ -7153,7 +7199,7 @@
         </p:nvSpPr>
         <p:spPr>
           <a:xfrm>
-            <a:off x="1450475" y="12245287"/>
+            <a:off x="1450475" y="12164605"/>
             <a:ext cx="7357200" cy="1597200"/>
           </a:xfrm>
           <a:prstGeom prst="rect">
@@ -7358,7 +7404,7 @@
         </p:nvSpPr>
         <p:spPr>
           <a:xfrm>
-            <a:off x="1450475" y="15287823"/>
+            <a:off x="1450475" y="15207141"/>
             <a:ext cx="7357200" cy="1597200"/>
           </a:xfrm>
           <a:prstGeom prst="rect">
@@ -7595,8 +7641,8 @@
         </p:nvSpPr>
         <p:spPr>
           <a:xfrm>
-            <a:off x="1450475" y="10626625"/>
-            <a:ext cx="7184700" cy="5258100"/>
+            <a:off x="1320800" y="10251440"/>
+            <a:ext cx="7630160" cy="6723575"/>
           </a:xfrm>
           <a:prstGeom prst="rect">
             <a:avLst/>
@@ -7612,7 +7658,7 @@
           </a:bodyPr>
           <a:lstStyle/>
           <a:p>
-            <a:pPr marL="0" lvl="0" indent="0" algn="l" rtl="0">
+            <a:pPr marL="0" lvl="0" indent="0" rtl="0">
               <a:lnSpc>
                 <a:spcPct val="150000"/>
               </a:lnSpc>
@@ -7626,7 +7672,7 @@
               <a:buNone/>
             </a:pPr>
             <a:r>
-              <a:rPr lang="es-419" sz="2200" dirty="0">
+              <a:rPr lang="es-419" sz="2400" dirty="0">
                 <a:solidFill>
                   <a:schemeClr val="lt1"/>
                 </a:solidFill>
@@ -7638,7 +7684,7 @@
               <a:t>&lt;&lt;</a:t>
             </a:r>
             <a:r>
-              <a:rPr lang="es-419" sz="2200" dirty="0" err="1">
+              <a:rPr lang="es-419" sz="2400" dirty="0" err="1">
                 <a:solidFill>
                   <a:schemeClr val="lt1"/>
                 </a:solidFill>
@@ -7650,7 +7696,7 @@
               <a:t>abstracto_desc</a:t>
             </a:r>
             <a:r>
-              <a:rPr lang="es-419" sz="2200" dirty="0">
+              <a:rPr lang="es-419" sz="2400" dirty="0">
                 <a:solidFill>
                   <a:schemeClr val="lt1"/>
                 </a:solidFill>
@@ -7661,18 +7707,9 @@
               </a:rPr>
               <a:t>&gt;&gt;</a:t>
             </a:r>
-            <a:endParaRPr sz="2200" dirty="0">
-              <a:solidFill>
-                <a:schemeClr val="lt1"/>
-              </a:solidFill>
-              <a:latin typeface="Formular" panose="02000000000000000000" pitchFamily="2" charset="0"/>
-              <a:ea typeface="Public Sans"/>
-              <a:cs typeface="Public Sans"/>
-              <a:sym typeface="Public Sans"/>
-            </a:endParaRPr>
-          </a:p>
-          <a:p>
-            <a:pPr marL="0" lvl="0" indent="0" algn="l" rtl="0">
+          </a:p>
+          <a:p>
+            <a:pPr marL="0" lvl="0" indent="0" rtl="0">
               <a:lnSpc>
                 <a:spcPct val="150000"/>
               </a:lnSpc>
@@ -7685,7 +7722,7 @@
               <a:buSzPts val="853"/>
               <a:buNone/>
             </a:pPr>
-            <a:endParaRPr sz="1850" dirty="0">
+            <a:endParaRPr lang="es-419" sz="2400" dirty="0">
               <a:solidFill>
                 <a:schemeClr val="lt1"/>
               </a:solidFill>
@@ -7696,7 +7733,7 @@
             </a:endParaRPr>
           </a:p>
           <a:p>
-            <a:pPr marL="0" lvl="0" indent="0" algn="l" rtl="0">
+            <a:pPr marL="0" lvl="0" indent="0" rtl="0">
               <a:spcBef>
                 <a:spcPts val="0"/>
               </a:spcBef>
@@ -7706,7 +7743,7 @@
               <a:buSzPts val="853"/>
               <a:buNone/>
             </a:pPr>
-            <a:endParaRPr sz="1850" dirty="0">
+            <a:endParaRPr sz="2400" dirty="0">
               <a:solidFill>
                 <a:schemeClr val="lt1"/>
               </a:solidFill>

--- a/assets/template_utp_alumnos.pptx
+++ b/assets/template_utp_alumnos.pptx
@@ -298,12 +298,12 @@
   <pc:docChgLst>
     <pc:chgData name="juani vila bach" userId="140d79d91c36b714" providerId="LiveId" clId="{681BBBA0-CB6B-4408-8383-25A2ECA50787}"/>
     <pc:docChg chg="undo custSel modSld">
-      <pc:chgData name="juani vila bach" userId="140d79d91c36b714" providerId="LiveId" clId="{681BBBA0-CB6B-4408-8383-25A2ECA50787}" dt="2026-04-29T20:45:29.205" v="60" actId="120"/>
+      <pc:chgData name="juani vila bach" userId="140d79d91c36b714" providerId="LiveId" clId="{681BBBA0-CB6B-4408-8383-25A2ECA50787}" dt="2026-04-30T13:33:13.314" v="64" actId="1076"/>
       <pc:docMkLst>
         <pc:docMk/>
       </pc:docMkLst>
       <pc:sldChg chg="modSp mod">
-        <pc:chgData name="juani vila bach" userId="140d79d91c36b714" providerId="LiveId" clId="{681BBBA0-CB6B-4408-8383-25A2ECA50787}" dt="2026-04-29T20:41:50.291" v="23" actId="2711"/>
+        <pc:chgData name="juani vila bach" userId="140d79d91c36b714" providerId="LiveId" clId="{681BBBA0-CB6B-4408-8383-25A2ECA50787}" dt="2026-04-30T13:33:13.314" v="64" actId="1076"/>
         <pc:sldMkLst>
           <pc:docMk/>
           <pc:sldMk cId="0" sldId="258"/>
@@ -324,15 +324,23 @@
             <ac:spMk id="65" creationId="{00000000-0000-0000-0000-000000000000}"/>
           </ac:spMkLst>
         </pc:spChg>
+        <pc:spChg chg="mod">
+          <ac:chgData name="juani vila bach" userId="140d79d91c36b714" providerId="LiveId" clId="{681BBBA0-CB6B-4408-8383-25A2ECA50787}" dt="2026-04-30T13:33:13.314" v="64" actId="1076"/>
+          <ac:spMkLst>
+            <pc:docMk/>
+            <pc:sldMk cId="0" sldId="258"/>
+            <ac:spMk id="66" creationId="{00000000-0000-0000-0000-000000000000}"/>
+          </ac:spMkLst>
+        </pc:spChg>
       </pc:sldChg>
       <pc:sldChg chg="addSp delSp modSp mod">
-        <pc:chgData name="juani vila bach" userId="140d79d91c36b714" providerId="LiveId" clId="{681BBBA0-CB6B-4408-8383-25A2ECA50787}" dt="2026-04-29T20:42:08.448" v="28" actId="1036"/>
+        <pc:chgData name="juani vila bach" userId="140d79d91c36b714" providerId="LiveId" clId="{681BBBA0-CB6B-4408-8383-25A2ECA50787}" dt="2026-04-30T13:32:32.873" v="61" actId="1035"/>
         <pc:sldMkLst>
           <pc:docMk/>
           <pc:sldMk cId="0" sldId="259"/>
         </pc:sldMkLst>
         <pc:spChg chg="add mod">
-          <ac:chgData name="juani vila bach" userId="140d79d91c36b714" providerId="LiveId" clId="{681BBBA0-CB6B-4408-8383-25A2ECA50787}" dt="2026-04-29T20:42:08.448" v="28" actId="1036"/>
+          <ac:chgData name="juani vila bach" userId="140d79d91c36b714" providerId="LiveId" clId="{681BBBA0-CB6B-4408-8383-25A2ECA50787}" dt="2026-04-30T13:32:32.873" v="61" actId="1035"/>
           <ac:spMkLst>
             <pc:docMk/>
             <pc:sldMk cId="0" sldId="259"/>
@@ -348,7 +356,7 @@
           </ac:spMkLst>
         </pc:spChg>
         <pc:spChg chg="add mod">
-          <ac:chgData name="juani vila bach" userId="140d79d91c36b714" providerId="LiveId" clId="{681BBBA0-CB6B-4408-8383-25A2ECA50787}" dt="2026-04-29T20:42:08.448" v="28" actId="1036"/>
+          <ac:chgData name="juani vila bach" userId="140d79d91c36b714" providerId="LiveId" clId="{681BBBA0-CB6B-4408-8383-25A2ECA50787}" dt="2026-04-30T13:32:32.873" v="61" actId="1035"/>
           <ac:spMkLst>
             <pc:docMk/>
             <pc:sldMk cId="0" sldId="259"/>
@@ -364,7 +372,7 @@
           </ac:spMkLst>
         </pc:spChg>
         <pc:spChg chg="add mod">
-          <ac:chgData name="juani vila bach" userId="140d79d91c36b714" providerId="LiveId" clId="{681BBBA0-CB6B-4408-8383-25A2ECA50787}" dt="2026-04-29T20:42:08.448" v="28" actId="1036"/>
+          <ac:chgData name="juani vila bach" userId="140d79d91c36b714" providerId="LiveId" clId="{681BBBA0-CB6B-4408-8383-25A2ECA50787}" dt="2026-04-30T13:32:32.873" v="61" actId="1035"/>
           <ac:spMkLst>
             <pc:docMk/>
             <pc:sldMk cId="0" sldId="259"/>
@@ -448,6 +456,45 @@
             <pc:docMk/>
             <pc:sldMk cId="0" sldId="260"/>
             <ac:spMk id="81" creationId="{00000000-0000-0000-0000-000000000000}"/>
+          </ac:spMkLst>
+        </pc:spChg>
+      </pc:sldChg>
+      <pc:sldChg chg="modSp mod">
+        <pc:chgData name="juani vila bach" userId="140d79d91c36b714" providerId="LiveId" clId="{681BBBA0-CB6B-4408-8383-25A2ECA50787}" dt="2026-04-30T13:32:44.495" v="62" actId="255"/>
+        <pc:sldMkLst>
+          <pc:docMk/>
+          <pc:sldMk cId="0" sldId="262"/>
+        </pc:sldMkLst>
+        <pc:spChg chg="mod">
+          <ac:chgData name="juani vila bach" userId="140d79d91c36b714" providerId="LiveId" clId="{681BBBA0-CB6B-4408-8383-25A2ECA50787}" dt="2026-04-30T13:32:44.495" v="62" actId="255"/>
+          <ac:spMkLst>
+            <pc:docMk/>
+            <pc:sldMk cId="0" sldId="262"/>
+            <ac:spMk id="94" creationId="{00000000-0000-0000-0000-000000000000}"/>
+          </ac:spMkLst>
+        </pc:spChg>
+        <pc:spChg chg="mod">
+          <ac:chgData name="juani vila bach" userId="140d79d91c36b714" providerId="LiveId" clId="{681BBBA0-CB6B-4408-8383-25A2ECA50787}" dt="2026-04-30T13:32:44.495" v="62" actId="255"/>
+          <ac:spMkLst>
+            <pc:docMk/>
+            <pc:sldMk cId="0" sldId="262"/>
+            <ac:spMk id="96" creationId="{00000000-0000-0000-0000-000000000000}"/>
+          </ac:spMkLst>
+        </pc:spChg>
+        <pc:spChg chg="mod">
+          <ac:chgData name="juani vila bach" userId="140d79d91c36b714" providerId="LiveId" clId="{681BBBA0-CB6B-4408-8383-25A2ECA50787}" dt="2026-04-30T13:32:44.495" v="62" actId="255"/>
+          <ac:spMkLst>
+            <pc:docMk/>
+            <pc:sldMk cId="0" sldId="262"/>
+            <ac:spMk id="98" creationId="{00000000-0000-0000-0000-000000000000}"/>
+          </ac:spMkLst>
+        </pc:spChg>
+        <pc:spChg chg="mod">
+          <ac:chgData name="juani vila bach" userId="140d79d91c36b714" providerId="LiveId" clId="{681BBBA0-CB6B-4408-8383-25A2ECA50787}" dt="2026-04-30T13:32:44.495" v="62" actId="255"/>
+          <ac:spMkLst>
+            <pc:docMk/>
+            <pc:sldMk cId="0" sldId="262"/>
+            <ac:spMk id="100" creationId="{00000000-0000-0000-0000-000000000000}"/>
           </ac:spMkLst>
         </pc:spChg>
       </pc:sldChg>
@@ -6901,8 +6948,8 @@
         </p:nvSpPr>
         <p:spPr>
           <a:xfrm>
-            <a:off x="900175" y="7675275"/>
-            <a:ext cx="8622900" cy="4832700"/>
+            <a:off x="2332255" y="7550584"/>
+            <a:ext cx="5542189" cy="4832700"/>
           </a:xfrm>
           <a:prstGeom prst="rect">
             <a:avLst/>
@@ -6994,7 +7041,7 @@
         </p:nvSpPr>
         <p:spPr>
           <a:xfrm>
-            <a:off x="1450475" y="9424667"/>
+            <a:off x="1450475" y="9383103"/>
             <a:ext cx="7357200" cy="1597200"/>
           </a:xfrm>
           <a:prstGeom prst="rect">
@@ -7199,7 +7246,7 @@
         </p:nvSpPr>
         <p:spPr>
           <a:xfrm>
-            <a:off x="1450475" y="12164605"/>
+            <a:off x="1450475" y="12123041"/>
             <a:ext cx="7357200" cy="1597200"/>
           </a:xfrm>
           <a:prstGeom prst="rect">
@@ -7404,7 +7451,7 @@
         </p:nvSpPr>
         <p:spPr>
           <a:xfrm>
-            <a:off x="1450475" y="15207141"/>
+            <a:off x="1450475" y="15165577"/>
             <a:ext cx="7357200" cy="1597200"/>
           </a:xfrm>
           <a:prstGeom prst="rect">
@@ -8382,7 +8429,7 @@
               <a:buNone/>
             </a:pPr>
             <a:r>
-              <a:rPr lang="es-419" sz="2350" b="1" dirty="0">
+              <a:rPr lang="es-419" sz="2600" b="1" dirty="0">
                 <a:solidFill>
                   <a:schemeClr val="dk1"/>
                 </a:solidFill>
@@ -8393,7 +8440,7 @@
               </a:rPr>
               <a:t>&lt;&lt;CARRERA_01&gt;&gt;</a:t>
             </a:r>
-            <a:endParaRPr sz="2350" b="1" dirty="0">
+            <a:endParaRPr sz="2600" b="1" dirty="0">
               <a:solidFill>
                 <a:schemeClr val="dk1"/>
               </a:solidFill>
@@ -8551,7 +8598,7 @@
               <a:buNone/>
             </a:pPr>
             <a:r>
-              <a:rPr lang="es-419" sz="2350" b="1">
+              <a:rPr lang="es-419" sz="2600" b="1">
                 <a:solidFill>
                   <a:schemeClr val="dk1"/>
                 </a:solidFill>
@@ -8562,7 +8609,7 @@
               </a:rPr>
               <a:t>&lt;&lt;CARRERA_02&gt;&gt;</a:t>
             </a:r>
-            <a:endParaRPr sz="2350" b="1">
+            <a:endParaRPr sz="2600" b="1">
               <a:solidFill>
                 <a:schemeClr val="dk1"/>
               </a:solidFill>
@@ -8720,7 +8767,7 @@
               <a:buNone/>
             </a:pPr>
             <a:r>
-              <a:rPr lang="es-419" sz="2350" b="1" dirty="0">
+              <a:rPr lang="es-419" sz="2600" b="1" dirty="0">
                 <a:solidFill>
                   <a:schemeClr val="dk1"/>
                 </a:solidFill>
@@ -8731,7 +8778,7 @@
               </a:rPr>
               <a:t>&lt;&lt;CARRERA_03&gt;&gt;</a:t>
             </a:r>
-            <a:endParaRPr sz="2350" b="1" dirty="0">
+            <a:endParaRPr sz="2600" b="1" dirty="0">
               <a:solidFill>
                 <a:schemeClr val="dk1"/>
               </a:solidFill>
@@ -8889,7 +8936,7 @@
               <a:buNone/>
             </a:pPr>
             <a:r>
-              <a:rPr lang="es-419" sz="2350" b="1" dirty="0">
+              <a:rPr lang="es-419" sz="2600" b="1" dirty="0">
                 <a:solidFill>
                   <a:schemeClr val="dk1"/>
                 </a:solidFill>
@@ -8900,7 +8947,7 @@
               </a:rPr>
               <a:t>&lt;&lt;CARRERA_04&gt;&gt;</a:t>
             </a:r>
-            <a:endParaRPr sz="2350" b="1" dirty="0">
+            <a:endParaRPr sz="2600" b="1" dirty="0">
               <a:solidFill>
                 <a:schemeClr val="dk1"/>
               </a:solidFill>

--- a/assets/template_utp_alumnos.pptx
+++ b/assets/template_utp_alumnos.pptx
@@ -298,12 +298,12 @@
   <pc:docChgLst>
     <pc:chgData name="juani vila bach" userId="140d79d91c36b714" providerId="LiveId" clId="{681BBBA0-CB6B-4408-8383-25A2ECA50787}"/>
     <pc:docChg chg="undo custSel modSld">
-      <pc:chgData name="juani vila bach" userId="140d79d91c36b714" providerId="LiveId" clId="{681BBBA0-CB6B-4408-8383-25A2ECA50787}" dt="2026-04-30T13:33:13.314" v="64" actId="1076"/>
+      <pc:chgData name="juani vila bach" userId="140d79d91c36b714" providerId="LiveId" clId="{681BBBA0-CB6B-4408-8383-25A2ECA50787}" dt="2026-04-30T19:26:19.805" v="66" actId="1076"/>
       <pc:docMkLst>
         <pc:docMk/>
       </pc:docMkLst>
       <pc:sldChg chg="modSp mod">
-        <pc:chgData name="juani vila bach" userId="140d79d91c36b714" providerId="LiveId" clId="{681BBBA0-CB6B-4408-8383-25A2ECA50787}" dt="2026-04-30T13:33:13.314" v="64" actId="1076"/>
+        <pc:chgData name="juani vila bach" userId="140d79d91c36b714" providerId="LiveId" clId="{681BBBA0-CB6B-4408-8383-25A2ECA50787}" dt="2026-04-30T19:26:19.805" v="66" actId="1076"/>
         <pc:sldMkLst>
           <pc:docMk/>
           <pc:sldMk cId="0" sldId="258"/>
@@ -325,7 +325,7 @@
           </ac:spMkLst>
         </pc:spChg>
         <pc:spChg chg="mod">
-          <ac:chgData name="juani vila bach" userId="140d79d91c36b714" providerId="LiveId" clId="{681BBBA0-CB6B-4408-8383-25A2ECA50787}" dt="2026-04-30T13:33:13.314" v="64" actId="1076"/>
+          <ac:chgData name="juani vila bach" userId="140d79d91c36b714" providerId="LiveId" clId="{681BBBA0-CB6B-4408-8383-25A2ECA50787}" dt="2026-04-30T19:26:19.805" v="66" actId="1076"/>
           <ac:spMkLst>
             <pc:docMk/>
             <pc:sldMk cId="0" sldId="258"/>
@@ -6948,8 +6948,8 @@
         </p:nvSpPr>
         <p:spPr>
           <a:xfrm>
-            <a:off x="2332255" y="7550584"/>
-            <a:ext cx="5542189" cy="4832700"/>
+            <a:off x="1843703" y="7550584"/>
+            <a:ext cx="6519294" cy="4832700"/>
           </a:xfrm>
           <a:prstGeom prst="rect">
             <a:avLst/>

--- a/assets/template_utp_alumnos.pptx
+++ b/assets/template_utp_alumnos.pptx
@@ -298,7 +298,7 @@
   <pc:docChgLst>
     <pc:chgData name="juani vila bach" userId="140d79d91c36b714" providerId="LiveId" clId="{681BBBA0-CB6B-4408-8383-25A2ECA50787}"/>
     <pc:docChg chg="undo custSel modSld">
-      <pc:chgData name="juani vila bach" userId="140d79d91c36b714" providerId="LiveId" clId="{681BBBA0-CB6B-4408-8383-25A2ECA50787}" dt="2026-04-30T19:26:19.805" v="66" actId="1076"/>
+      <pc:chgData name="juani vila bach" userId="140d79d91c36b714" providerId="LiveId" clId="{681BBBA0-CB6B-4408-8383-25A2ECA50787}" dt="2026-05-11T19:20:20.342" v="70" actId="255"/>
       <pc:docMkLst>
         <pc:docMk/>
       </pc:docMkLst>
@@ -334,13 +334,13 @@
         </pc:spChg>
       </pc:sldChg>
       <pc:sldChg chg="addSp delSp modSp mod">
-        <pc:chgData name="juani vila bach" userId="140d79d91c36b714" providerId="LiveId" clId="{681BBBA0-CB6B-4408-8383-25A2ECA50787}" dt="2026-04-30T13:32:32.873" v="61" actId="1035"/>
+        <pc:chgData name="juani vila bach" userId="140d79d91c36b714" providerId="LiveId" clId="{681BBBA0-CB6B-4408-8383-25A2ECA50787}" dt="2026-05-11T19:20:00.017" v="69" actId="1035"/>
         <pc:sldMkLst>
           <pc:docMk/>
           <pc:sldMk cId="0" sldId="259"/>
         </pc:sldMkLst>
         <pc:spChg chg="add mod">
-          <ac:chgData name="juani vila bach" userId="140d79d91c36b714" providerId="LiveId" clId="{681BBBA0-CB6B-4408-8383-25A2ECA50787}" dt="2026-04-30T13:32:32.873" v="61" actId="1035"/>
+          <ac:chgData name="juani vila bach" userId="140d79d91c36b714" providerId="LiveId" clId="{681BBBA0-CB6B-4408-8383-25A2ECA50787}" dt="2026-05-11T19:20:00.017" v="69" actId="1035"/>
           <ac:spMkLst>
             <pc:docMk/>
             <pc:sldMk cId="0" sldId="259"/>
@@ -356,7 +356,7 @@
           </ac:spMkLst>
         </pc:spChg>
         <pc:spChg chg="add mod">
-          <ac:chgData name="juani vila bach" userId="140d79d91c36b714" providerId="LiveId" clId="{681BBBA0-CB6B-4408-8383-25A2ECA50787}" dt="2026-04-30T13:32:32.873" v="61" actId="1035"/>
+          <ac:chgData name="juani vila bach" userId="140d79d91c36b714" providerId="LiveId" clId="{681BBBA0-CB6B-4408-8383-25A2ECA50787}" dt="2026-05-11T19:20:00.017" v="69" actId="1035"/>
           <ac:spMkLst>
             <pc:docMk/>
             <pc:sldMk cId="0" sldId="259"/>
@@ -372,7 +372,7 @@
           </ac:spMkLst>
         </pc:spChg>
         <pc:spChg chg="add mod">
-          <ac:chgData name="juani vila bach" userId="140d79d91c36b714" providerId="LiveId" clId="{681BBBA0-CB6B-4408-8383-25A2ECA50787}" dt="2026-04-30T13:32:32.873" v="61" actId="1035"/>
+          <ac:chgData name="juani vila bach" userId="140d79d91c36b714" providerId="LiveId" clId="{681BBBA0-CB6B-4408-8383-25A2ECA50787}" dt="2026-05-11T19:20:00.017" v="69" actId="1035"/>
           <ac:spMkLst>
             <pc:docMk/>
             <pc:sldMk cId="0" sldId="259"/>
@@ -387,54 +387,6 @@
             <ac:spMk id="7" creationId="{B8352233-FDDC-F12C-14EE-F1E2A8D65D59}"/>
           </ac:spMkLst>
         </pc:spChg>
-        <pc:spChg chg="del">
-          <ac:chgData name="juani vila bach" userId="140d79d91c36b714" providerId="LiveId" clId="{681BBBA0-CB6B-4408-8383-25A2ECA50787}" dt="2026-04-29T19:05:26.526" v="0" actId="478"/>
-          <ac:spMkLst>
-            <pc:docMk/>
-            <pc:sldMk cId="0" sldId="259"/>
-            <ac:spMk id="71" creationId="{00000000-0000-0000-0000-000000000000}"/>
-          </ac:spMkLst>
-        </pc:spChg>
-        <pc:spChg chg="del">
-          <ac:chgData name="juani vila bach" userId="140d79d91c36b714" providerId="LiveId" clId="{681BBBA0-CB6B-4408-8383-25A2ECA50787}" dt="2026-04-29T19:05:26.526" v="0" actId="478"/>
-          <ac:spMkLst>
-            <pc:docMk/>
-            <pc:sldMk cId="0" sldId="259"/>
-            <ac:spMk id="72" creationId="{00000000-0000-0000-0000-000000000000}"/>
-          </ac:spMkLst>
-        </pc:spChg>
-        <pc:spChg chg="del">
-          <ac:chgData name="juani vila bach" userId="140d79d91c36b714" providerId="LiveId" clId="{681BBBA0-CB6B-4408-8383-25A2ECA50787}" dt="2026-04-29T19:05:26.526" v="0" actId="478"/>
-          <ac:spMkLst>
-            <pc:docMk/>
-            <pc:sldMk cId="0" sldId="259"/>
-            <ac:spMk id="73" creationId="{00000000-0000-0000-0000-000000000000}"/>
-          </ac:spMkLst>
-        </pc:spChg>
-        <pc:spChg chg="del">
-          <ac:chgData name="juani vila bach" userId="140d79d91c36b714" providerId="LiveId" clId="{681BBBA0-CB6B-4408-8383-25A2ECA50787}" dt="2026-04-29T19:05:26.526" v="0" actId="478"/>
-          <ac:spMkLst>
-            <pc:docMk/>
-            <pc:sldMk cId="0" sldId="259"/>
-            <ac:spMk id="74" creationId="{00000000-0000-0000-0000-000000000000}"/>
-          </ac:spMkLst>
-        </pc:spChg>
-        <pc:spChg chg="del">
-          <ac:chgData name="juani vila bach" userId="140d79d91c36b714" providerId="LiveId" clId="{681BBBA0-CB6B-4408-8383-25A2ECA50787}" dt="2026-04-29T19:05:26.526" v="0" actId="478"/>
-          <ac:spMkLst>
-            <pc:docMk/>
-            <pc:sldMk cId="0" sldId="259"/>
-            <ac:spMk id="75" creationId="{00000000-0000-0000-0000-000000000000}"/>
-          </ac:spMkLst>
-        </pc:spChg>
-        <pc:spChg chg="del">
-          <ac:chgData name="juani vila bach" userId="140d79d91c36b714" providerId="LiveId" clId="{681BBBA0-CB6B-4408-8383-25A2ECA50787}" dt="2026-04-29T19:05:26.526" v="0" actId="478"/>
-          <ac:spMkLst>
-            <pc:docMk/>
-            <pc:sldMk cId="0" sldId="259"/>
-            <ac:spMk id="76" creationId="{00000000-0000-0000-0000-000000000000}"/>
-          </ac:spMkLst>
-        </pc:spChg>
       </pc:sldChg>
       <pc:sldChg chg="addSp delSp modSp mod">
         <pc:chgData name="juani vila bach" userId="140d79d91c36b714" providerId="LiveId" clId="{681BBBA0-CB6B-4408-8383-25A2ECA50787}" dt="2026-04-29T20:45:29.205" v="60" actId="120"/>
@@ -442,14 +394,6 @@
           <pc:docMk/>
           <pc:sldMk cId="0" sldId="260"/>
         </pc:sldMkLst>
-        <pc:spChg chg="add del mod">
-          <ac:chgData name="juani vila bach" userId="140d79d91c36b714" providerId="LiveId" clId="{681BBBA0-CB6B-4408-8383-25A2ECA50787}" dt="2026-04-29T20:43:09.289" v="39" actId="478"/>
-          <ac:spMkLst>
-            <pc:docMk/>
-            <pc:sldMk cId="0" sldId="260"/>
-            <ac:spMk id="2" creationId="{BD6AED9D-657A-0B87-F240-6ACC1E86BFB6}"/>
-          </ac:spMkLst>
-        </pc:spChg>
         <pc:spChg chg="mod">
           <ac:chgData name="juani vila bach" userId="140d79d91c36b714" providerId="LiveId" clId="{681BBBA0-CB6B-4408-8383-25A2ECA50787}" dt="2026-04-29T20:45:29.205" v="60" actId="120"/>
           <ac:spMkLst>
@@ -460,7 +404,7 @@
         </pc:spChg>
       </pc:sldChg>
       <pc:sldChg chg="modSp mod">
-        <pc:chgData name="juani vila bach" userId="140d79d91c36b714" providerId="LiveId" clId="{681BBBA0-CB6B-4408-8383-25A2ECA50787}" dt="2026-04-30T13:32:44.495" v="62" actId="255"/>
+        <pc:chgData name="juani vila bach" userId="140d79d91c36b714" providerId="LiveId" clId="{681BBBA0-CB6B-4408-8383-25A2ECA50787}" dt="2026-05-11T19:20:20.342" v="70" actId="255"/>
         <pc:sldMkLst>
           <pc:docMk/>
           <pc:sldMk cId="0" sldId="262"/>
@@ -474,11 +418,27 @@
           </ac:spMkLst>
         </pc:spChg>
         <pc:spChg chg="mod">
+          <ac:chgData name="juani vila bach" userId="140d79d91c36b714" providerId="LiveId" clId="{681BBBA0-CB6B-4408-8383-25A2ECA50787}" dt="2026-05-11T19:20:20.342" v="70" actId="255"/>
+          <ac:spMkLst>
+            <pc:docMk/>
+            <pc:sldMk cId="0" sldId="262"/>
+            <ac:spMk id="95" creationId="{00000000-0000-0000-0000-000000000000}"/>
+          </ac:spMkLst>
+        </pc:spChg>
+        <pc:spChg chg="mod">
           <ac:chgData name="juani vila bach" userId="140d79d91c36b714" providerId="LiveId" clId="{681BBBA0-CB6B-4408-8383-25A2ECA50787}" dt="2026-04-30T13:32:44.495" v="62" actId="255"/>
           <ac:spMkLst>
             <pc:docMk/>
             <pc:sldMk cId="0" sldId="262"/>
             <ac:spMk id="96" creationId="{00000000-0000-0000-0000-000000000000}"/>
+          </ac:spMkLst>
+        </pc:spChg>
+        <pc:spChg chg="mod">
+          <ac:chgData name="juani vila bach" userId="140d79d91c36b714" providerId="LiveId" clId="{681BBBA0-CB6B-4408-8383-25A2ECA50787}" dt="2026-05-11T19:20:20.342" v="70" actId="255"/>
+          <ac:spMkLst>
+            <pc:docMk/>
+            <pc:sldMk cId="0" sldId="262"/>
+            <ac:spMk id="97" creationId="{00000000-0000-0000-0000-000000000000}"/>
           </ac:spMkLst>
         </pc:spChg>
         <pc:spChg chg="mod">
@@ -490,11 +450,27 @@
           </ac:spMkLst>
         </pc:spChg>
         <pc:spChg chg="mod">
+          <ac:chgData name="juani vila bach" userId="140d79d91c36b714" providerId="LiveId" clId="{681BBBA0-CB6B-4408-8383-25A2ECA50787}" dt="2026-05-11T19:20:20.342" v="70" actId="255"/>
+          <ac:spMkLst>
+            <pc:docMk/>
+            <pc:sldMk cId="0" sldId="262"/>
+            <ac:spMk id="99" creationId="{00000000-0000-0000-0000-000000000000}"/>
+          </ac:spMkLst>
+        </pc:spChg>
+        <pc:spChg chg="mod">
           <ac:chgData name="juani vila bach" userId="140d79d91c36b714" providerId="LiveId" clId="{681BBBA0-CB6B-4408-8383-25A2ECA50787}" dt="2026-04-30T13:32:44.495" v="62" actId="255"/>
           <ac:spMkLst>
             <pc:docMk/>
             <pc:sldMk cId="0" sldId="262"/>
             <ac:spMk id="100" creationId="{00000000-0000-0000-0000-000000000000}"/>
+          </ac:spMkLst>
+        </pc:spChg>
+        <pc:spChg chg="mod">
+          <ac:chgData name="juani vila bach" userId="140d79d91c36b714" providerId="LiveId" clId="{681BBBA0-CB6B-4408-8383-25A2ECA50787}" dt="2026-05-11T19:20:20.342" v="70" actId="255"/>
+          <ac:spMkLst>
+            <pc:docMk/>
+            <pc:sldMk cId="0" sldId="262"/>
+            <ac:spMk id="101" creationId="{00000000-0000-0000-0000-000000000000}"/>
           </ac:spMkLst>
         </pc:spChg>
       </pc:sldChg>
@@ -7041,7 +7017,7 @@
         </p:nvSpPr>
         <p:spPr>
           <a:xfrm>
-            <a:off x="1450475" y="9383103"/>
+            <a:off x="1450475" y="9329315"/>
             <a:ext cx="7357200" cy="1597200"/>
           </a:xfrm>
           <a:prstGeom prst="rect">
@@ -7072,7 +7048,7 @@
               <a:buNone/>
             </a:pPr>
             <a:r>
-              <a:rPr lang="es-419" sz="2000" dirty="0">
+              <a:rPr lang="es-419" sz="1600" dirty="0">
                 <a:solidFill>
                   <a:schemeClr val="dk1"/>
                 </a:solidFill>
@@ -7083,7 +7059,7 @@
               </a:rPr>
               <a:t>&lt;&lt;gardner_01_desc&gt;&gt;</a:t>
             </a:r>
-            <a:endParaRPr sz="2000" dirty="0">
+            <a:endParaRPr sz="1600" dirty="0">
               <a:solidFill>
                 <a:schemeClr val="dk1"/>
               </a:solidFill>
@@ -7107,7 +7083,7 @@
               <a:buSzPts val="853"/>
               <a:buNone/>
             </a:pPr>
-            <a:endParaRPr sz="1850" dirty="0">
+            <a:endParaRPr sz="1600" dirty="0">
               <a:solidFill>
                 <a:schemeClr val="dk1"/>
               </a:solidFill>
@@ -7128,7 +7104,7 @@
               <a:buSzPts val="853"/>
               <a:buNone/>
             </a:pPr>
-            <a:endParaRPr sz="1850" dirty="0">
+            <a:endParaRPr sz="1600" dirty="0">
               <a:solidFill>
                 <a:schemeClr val="dk2"/>
               </a:solidFill>
@@ -7246,7 +7222,7 @@
         </p:nvSpPr>
         <p:spPr>
           <a:xfrm>
-            <a:off x="1450475" y="12123041"/>
+            <a:off x="1450475" y="12069253"/>
             <a:ext cx="7357200" cy="1597200"/>
           </a:xfrm>
           <a:prstGeom prst="rect">
@@ -7277,7 +7253,7 @@
               <a:buNone/>
             </a:pPr>
             <a:r>
-              <a:rPr lang="es-419" sz="2000" dirty="0">
+              <a:rPr lang="es-419" sz="1600" dirty="0">
                 <a:solidFill>
                   <a:schemeClr val="dk1"/>
                 </a:solidFill>
@@ -7288,7 +7264,7 @@
               </a:rPr>
               <a:t>&lt;&lt;gardner_02_desc&gt;&gt;</a:t>
             </a:r>
-            <a:endParaRPr sz="2000" dirty="0">
+            <a:endParaRPr sz="1600" dirty="0">
               <a:solidFill>
                 <a:schemeClr val="dk1"/>
               </a:solidFill>
@@ -7312,7 +7288,7 @@
               <a:buSzPts val="853"/>
               <a:buNone/>
             </a:pPr>
-            <a:endParaRPr sz="1850" dirty="0">
+            <a:endParaRPr sz="1600" dirty="0">
               <a:solidFill>
                 <a:schemeClr val="dk1"/>
               </a:solidFill>
@@ -7333,7 +7309,7 @@
               <a:buSzPts val="853"/>
               <a:buNone/>
             </a:pPr>
-            <a:endParaRPr sz="1850" dirty="0">
+            <a:endParaRPr sz="1600" dirty="0">
               <a:solidFill>
                 <a:schemeClr val="dk2"/>
               </a:solidFill>
@@ -7451,7 +7427,7 @@
         </p:nvSpPr>
         <p:spPr>
           <a:xfrm>
-            <a:off x="1450475" y="15165577"/>
+            <a:off x="1450475" y="15111789"/>
             <a:ext cx="7357200" cy="1597200"/>
           </a:xfrm>
           <a:prstGeom prst="rect">
@@ -7482,7 +7458,7 @@
               <a:buNone/>
             </a:pPr>
             <a:r>
-              <a:rPr lang="es-419" sz="2000" dirty="0">
+              <a:rPr lang="es-419" sz="1600" dirty="0">
                 <a:solidFill>
                   <a:schemeClr val="dk1"/>
                 </a:solidFill>
@@ -7493,7 +7469,7 @@
               </a:rPr>
               <a:t>&lt;&lt;gardner_03_desc&gt;&gt;</a:t>
             </a:r>
-            <a:endParaRPr sz="2000" dirty="0">
+            <a:endParaRPr sz="1600" dirty="0">
               <a:solidFill>
                 <a:schemeClr val="dk1"/>
               </a:solidFill>
@@ -7517,7 +7493,7 @@
               <a:buSzPts val="853"/>
               <a:buNone/>
             </a:pPr>
-            <a:endParaRPr sz="1850" dirty="0">
+            <a:endParaRPr sz="1600" dirty="0">
               <a:solidFill>
                 <a:schemeClr val="dk1"/>
               </a:solidFill>
@@ -7538,7 +7514,7 @@
               <a:buSzPts val="853"/>
               <a:buNone/>
             </a:pPr>
-            <a:endParaRPr sz="1850" dirty="0">
+            <a:endParaRPr sz="1600" dirty="0">
               <a:solidFill>
                 <a:schemeClr val="dk2"/>
               </a:solidFill>
@@ -8491,7 +8467,7 @@
               <a:buNone/>
             </a:pPr>
             <a:r>
-              <a:rPr lang="es-419" sz="2000" dirty="0">
+              <a:rPr lang="es-419" sz="1600" dirty="0">
                 <a:solidFill>
                   <a:schemeClr val="dk1"/>
                 </a:solidFill>
@@ -8502,7 +8478,7 @@
               </a:rPr>
               <a:t>&lt;&lt;carrera_01_desc&gt;&gt;</a:t>
             </a:r>
-            <a:endParaRPr sz="2000" dirty="0">
+            <a:endParaRPr sz="1600" dirty="0">
               <a:solidFill>
                 <a:schemeClr val="dk1"/>
               </a:solidFill>
@@ -8526,7 +8502,7 @@
               <a:buSzPts val="853"/>
               <a:buNone/>
             </a:pPr>
-            <a:endParaRPr sz="1850" dirty="0">
+            <a:endParaRPr sz="1600" dirty="0">
               <a:solidFill>
                 <a:schemeClr val="dk1"/>
               </a:solidFill>
@@ -8547,7 +8523,7 @@
               <a:buSzPts val="853"/>
               <a:buNone/>
             </a:pPr>
-            <a:endParaRPr sz="1850" dirty="0">
+            <a:endParaRPr sz="1600" dirty="0">
               <a:solidFill>
                 <a:schemeClr val="dk2"/>
               </a:solidFill>
@@ -8660,7 +8636,7 @@
               <a:buNone/>
             </a:pPr>
             <a:r>
-              <a:rPr lang="es-419" sz="2000" dirty="0">
+              <a:rPr lang="es-419" sz="1600" dirty="0">
                 <a:solidFill>
                   <a:schemeClr val="dk1"/>
                 </a:solidFill>
@@ -8671,7 +8647,7 @@
               </a:rPr>
               <a:t>&lt;&lt;carrera_02_desc&gt;&gt;</a:t>
             </a:r>
-            <a:endParaRPr sz="2000" dirty="0">
+            <a:endParaRPr sz="1600" dirty="0">
               <a:solidFill>
                 <a:schemeClr val="dk1"/>
               </a:solidFill>
@@ -8695,7 +8671,7 @@
               <a:buSzPts val="853"/>
               <a:buNone/>
             </a:pPr>
-            <a:endParaRPr sz="1850" dirty="0">
+            <a:endParaRPr sz="1600" dirty="0">
               <a:solidFill>
                 <a:schemeClr val="dk1"/>
               </a:solidFill>
@@ -8716,7 +8692,7 @@
               <a:buSzPts val="853"/>
               <a:buNone/>
             </a:pPr>
-            <a:endParaRPr sz="1850" dirty="0">
+            <a:endParaRPr sz="1600" dirty="0">
               <a:solidFill>
                 <a:schemeClr val="dk2"/>
               </a:solidFill>
@@ -8829,7 +8805,7 @@
               <a:buNone/>
             </a:pPr>
             <a:r>
-              <a:rPr lang="es-419" sz="2000" dirty="0">
+              <a:rPr lang="es-419" sz="1600" dirty="0">
                 <a:solidFill>
                   <a:schemeClr val="dk1"/>
                 </a:solidFill>
@@ -8840,7 +8816,7 @@
               </a:rPr>
               <a:t>&lt;&lt;carrera_03_desc&gt;&gt;</a:t>
             </a:r>
-            <a:endParaRPr sz="2000" dirty="0">
+            <a:endParaRPr sz="1600" dirty="0">
               <a:solidFill>
                 <a:schemeClr val="dk1"/>
               </a:solidFill>
@@ -8864,7 +8840,7 @@
               <a:buSzPts val="853"/>
               <a:buNone/>
             </a:pPr>
-            <a:endParaRPr sz="1850" dirty="0">
+            <a:endParaRPr sz="1600" dirty="0">
               <a:solidFill>
                 <a:schemeClr val="dk1"/>
               </a:solidFill>
@@ -8885,7 +8861,7 @@
               <a:buSzPts val="853"/>
               <a:buNone/>
             </a:pPr>
-            <a:endParaRPr sz="1850" dirty="0">
+            <a:endParaRPr sz="1600" dirty="0">
               <a:solidFill>
                 <a:schemeClr val="dk2"/>
               </a:solidFill>
@@ -8998,7 +8974,7 @@
               <a:buNone/>
             </a:pPr>
             <a:r>
-              <a:rPr lang="es-419" sz="2000" dirty="0">
+              <a:rPr lang="es-419" sz="1600" dirty="0">
                 <a:solidFill>
                   <a:schemeClr val="dk1"/>
                 </a:solidFill>
@@ -9009,7 +8985,7 @@
               </a:rPr>
               <a:t>&lt;&lt;carrera_04_desc&gt;&gt;</a:t>
             </a:r>
-            <a:endParaRPr sz="2000" dirty="0">
+            <a:endParaRPr sz="1600" dirty="0">
               <a:solidFill>
                 <a:schemeClr val="dk1"/>
               </a:solidFill>
@@ -9033,7 +9009,7 @@
               <a:buSzPts val="853"/>
               <a:buNone/>
             </a:pPr>
-            <a:endParaRPr sz="1850" dirty="0">
+            <a:endParaRPr sz="1600" dirty="0">
               <a:solidFill>
                 <a:schemeClr val="dk1"/>
               </a:solidFill>
@@ -9054,7 +9030,7 @@
               <a:buSzPts val="853"/>
               <a:buNone/>
             </a:pPr>
-            <a:endParaRPr sz="1850" dirty="0">
+            <a:endParaRPr sz="1600" dirty="0">
               <a:solidFill>
                 <a:schemeClr val="dk2"/>
               </a:solidFill>

--- a/assets/template_utp_alumnos.pptx
+++ b/assets/template_utp_alumnos.pptx
@@ -298,7 +298,7 @@
   <pc:docChgLst>
     <pc:chgData name="juani vila bach" userId="140d79d91c36b714" providerId="LiveId" clId="{681BBBA0-CB6B-4408-8383-25A2ECA50787}"/>
     <pc:docChg chg="undo custSel modSld">
-      <pc:chgData name="juani vila bach" userId="140d79d91c36b714" providerId="LiveId" clId="{681BBBA0-CB6B-4408-8383-25A2ECA50787}" dt="2026-05-11T19:20:20.342" v="70" actId="255"/>
+      <pc:chgData name="juani vila bach" userId="140d79d91c36b714" providerId="LiveId" clId="{681BBBA0-CB6B-4408-8383-25A2ECA50787}" dt="2026-05-12T21:52:18.081" v="74"/>
       <pc:docMkLst>
         <pc:docMk/>
       </pc:docMkLst>
@@ -334,13 +334,13 @@
         </pc:spChg>
       </pc:sldChg>
       <pc:sldChg chg="addSp delSp modSp mod">
-        <pc:chgData name="juani vila bach" userId="140d79d91c36b714" providerId="LiveId" clId="{681BBBA0-CB6B-4408-8383-25A2ECA50787}" dt="2026-05-11T19:20:00.017" v="69" actId="1035"/>
+        <pc:chgData name="juani vila bach" userId="140d79d91c36b714" providerId="LiveId" clId="{681BBBA0-CB6B-4408-8383-25A2ECA50787}" dt="2026-05-12T21:52:18.081" v="74"/>
         <pc:sldMkLst>
           <pc:docMk/>
           <pc:sldMk cId="0" sldId="259"/>
         </pc:sldMkLst>
         <pc:spChg chg="add mod">
-          <ac:chgData name="juani vila bach" userId="140d79d91c36b714" providerId="LiveId" clId="{681BBBA0-CB6B-4408-8383-25A2ECA50787}" dt="2026-05-11T19:20:00.017" v="69" actId="1035"/>
+          <ac:chgData name="juani vila bach" userId="140d79d91c36b714" providerId="LiveId" clId="{681BBBA0-CB6B-4408-8383-25A2ECA50787}" dt="2026-05-12T21:52:18.081" v="74"/>
           <ac:spMkLst>
             <pc:docMk/>
             <pc:sldMk cId="0" sldId="259"/>
@@ -356,7 +356,7 @@
           </ac:spMkLst>
         </pc:spChg>
         <pc:spChg chg="add mod">
-          <ac:chgData name="juani vila bach" userId="140d79d91c36b714" providerId="LiveId" clId="{681BBBA0-CB6B-4408-8383-25A2ECA50787}" dt="2026-05-11T19:20:00.017" v="69" actId="1035"/>
+          <ac:chgData name="juani vila bach" userId="140d79d91c36b714" providerId="LiveId" clId="{681BBBA0-CB6B-4408-8383-25A2ECA50787}" dt="2026-05-12T21:52:00.094" v="72" actId="255"/>
           <ac:spMkLst>
             <pc:docMk/>
             <pc:sldMk cId="0" sldId="259"/>
@@ -372,7 +372,7 @@
           </ac:spMkLst>
         </pc:spChg>
         <pc:spChg chg="add mod">
-          <ac:chgData name="juani vila bach" userId="140d79d91c36b714" providerId="LiveId" clId="{681BBBA0-CB6B-4408-8383-25A2ECA50787}" dt="2026-05-11T19:20:00.017" v="69" actId="1035"/>
+          <ac:chgData name="juani vila bach" userId="140d79d91c36b714" providerId="LiveId" clId="{681BBBA0-CB6B-4408-8383-25A2ECA50787}" dt="2026-05-12T21:52:00.094" v="72" actId="255"/>
           <ac:spMkLst>
             <pc:docMk/>
             <pc:sldMk cId="0" sldId="259"/>
@@ -7048,7 +7048,7 @@
               <a:buNone/>
             </a:pPr>
             <a:r>
-              <a:rPr lang="es-419" sz="1600" dirty="0">
+              <a:rPr lang="es-419" sz="2000" dirty="0">
                 <a:solidFill>
                   <a:schemeClr val="dk1"/>
                 </a:solidFill>
@@ -7059,7 +7059,7 @@
               </a:rPr>
               <a:t>&lt;&lt;gardner_01_desc&gt;&gt;</a:t>
             </a:r>
-            <a:endParaRPr sz="1600" dirty="0">
+            <a:endParaRPr sz="2000" dirty="0">
               <a:solidFill>
                 <a:schemeClr val="dk1"/>
               </a:solidFill>
@@ -7083,7 +7083,7 @@
               <a:buSzPts val="853"/>
               <a:buNone/>
             </a:pPr>
-            <a:endParaRPr sz="1600" dirty="0">
+            <a:endParaRPr sz="2000" dirty="0">
               <a:solidFill>
                 <a:schemeClr val="dk1"/>
               </a:solidFill>
@@ -7104,7 +7104,7 @@
               <a:buSzPts val="853"/>
               <a:buNone/>
             </a:pPr>
-            <a:endParaRPr sz="1600" dirty="0">
+            <a:endParaRPr sz="2000" dirty="0">
               <a:solidFill>
                 <a:schemeClr val="dk2"/>
               </a:solidFill>
@@ -7253,7 +7253,7 @@
               <a:buNone/>
             </a:pPr>
             <a:r>
-              <a:rPr lang="es-419" sz="1600" dirty="0">
+              <a:rPr lang="es-419" sz="2000" dirty="0">
                 <a:solidFill>
                   <a:schemeClr val="dk1"/>
                 </a:solidFill>
@@ -7264,7 +7264,7 @@
               </a:rPr>
               <a:t>&lt;&lt;gardner_02_desc&gt;&gt;</a:t>
             </a:r>
-            <a:endParaRPr sz="1600" dirty="0">
+            <a:endParaRPr sz="2000" dirty="0">
               <a:solidFill>
                 <a:schemeClr val="dk1"/>
               </a:solidFill>
@@ -7288,7 +7288,7 @@
               <a:buSzPts val="853"/>
               <a:buNone/>
             </a:pPr>
-            <a:endParaRPr sz="1600" dirty="0">
+            <a:endParaRPr sz="2000" dirty="0">
               <a:solidFill>
                 <a:schemeClr val="dk1"/>
               </a:solidFill>
@@ -7309,7 +7309,7 @@
               <a:buSzPts val="853"/>
               <a:buNone/>
             </a:pPr>
-            <a:endParaRPr sz="1600" dirty="0">
+            <a:endParaRPr sz="2000" dirty="0">
               <a:solidFill>
                 <a:schemeClr val="dk2"/>
               </a:solidFill>
@@ -7458,7 +7458,7 @@
               <a:buNone/>
             </a:pPr>
             <a:r>
-              <a:rPr lang="es-419" sz="1600" dirty="0">
+              <a:rPr lang="es-419" sz="2000" dirty="0">
                 <a:solidFill>
                   <a:schemeClr val="dk1"/>
                 </a:solidFill>
@@ -7469,7 +7469,7 @@
               </a:rPr>
               <a:t>&lt;&lt;gardner_03_desc&gt;&gt;</a:t>
             </a:r>
-            <a:endParaRPr sz="1600" dirty="0">
+            <a:endParaRPr sz="2000" dirty="0">
               <a:solidFill>
                 <a:schemeClr val="dk1"/>
               </a:solidFill>
@@ -7493,7 +7493,7 @@
               <a:buSzPts val="853"/>
               <a:buNone/>
             </a:pPr>
-            <a:endParaRPr sz="1600" dirty="0">
+            <a:endParaRPr sz="2000" dirty="0">
               <a:solidFill>
                 <a:schemeClr val="dk1"/>
               </a:solidFill>
@@ -7514,7 +7514,7 @@
               <a:buSzPts val="853"/>
               <a:buNone/>
             </a:pPr>
-            <a:endParaRPr sz="1600" dirty="0">
+            <a:endParaRPr sz="2000" dirty="0">
               <a:solidFill>
                 <a:schemeClr val="dk2"/>
               </a:solidFill>

--- a/assets/template_utp_alumnos.pptx
+++ b/assets/template_utp_alumnos.pptx
@@ -6506,10 +6506,11 @@
   <p:cSld>
     <p:bg>
       <p:bgPr>
-        <a:blipFill>
+        <a:blipFill dpi="0" rotWithShape="1">
           <a:blip r:embed="rId3">
-            <a:alphaModFix/>
+            <a:lum/>
           </a:blip>
+          <a:srcRect/>
           <a:stretch>
             <a:fillRect/>
           </a:stretch>
